--- a/slides/module5-automation.pptx
+++ b/slides/module5-automation.pptx
@@ -14,9 +14,10 @@
     <p:sldId id="262" r:id="rId8"/>
     <p:sldId id="263" r:id="rId9"/>
     <p:sldId id="264" r:id="rId10"/>
+    <p:sldId id="265" r:id="rId11"/>
   </p:sldIdLst>
   <p:notesMasterIdLst>
-    <p:notesMasterId r:id="rId11"/>
+    <p:notesMasterId r:id="rId12"/>
   </p:notesMasterIdLst>
   <p:sldSz cx="12192000" cy="6858000"/>
   <p:notesSz cx="6858000" cy="12192000"/>
@@ -534,6 +535,94 @@
             <a:fld id="{F7021451-1387-4CA6-816F-3879F97B5CBC}" type="slidenum">
               <a:rPr lang="en-US"/>
               <a:t>1</a:t>
+            </a:fld>
+            <a:endParaRPr lang="en-US"/>
+          </a:p>
+        </p:txBody>
+      </p:sp>
+    </p:spTree>
+    <p:extLst>
+      <p:ext uri="{BB962C8B-B14F-4D97-AF65-F5344CB8AC3E}">
+        <p14:creationId xmlns:p14="http://schemas.microsoft.com/office/powerpoint/2010/main" val="1024086991"/>
+      </p:ext>
+    </p:extLst>
+  </p:cSld>
+  <p:clrMapOvr>
+    <a:masterClrMapping/>
+  </p:clrMapOvr>
+</p:notes>
+</file>
+
+<file path=ppt/notesSlides/notesSlide10.xml><?xml version="1.0" encoding="utf-8"?>
+<p:notes xmlns:a="http://schemas.openxmlformats.org/drawingml/2006/main" xmlns:r="http://schemas.openxmlformats.org/officeDocument/2006/relationships" xmlns:p="http://schemas.openxmlformats.org/presentationml/2006/main">
+  <p:cSld>
+    <p:spTree>
+      <p:nvGrpSpPr>
+        <p:cNvPr id="1" name=""/>
+        <p:cNvGrpSpPr/>
+        <p:nvPr/>
+      </p:nvGrpSpPr>
+      <p:grpSpPr>
+        <a:xfrm>
+          <a:off x="0" y="0"/>
+          <a:ext cx="0" cy="0"/>
+          <a:chOff x="0" y="0"/>
+          <a:chExt cx="0" cy="0"/>
+        </a:xfrm>
+      </p:grpSpPr>
+      <p:sp>
+        <p:nvSpPr>
+          <p:cNvPr id="2" name="Slide Image Placeholder 1"/>
+          <p:cNvSpPr>
+            <a:spLocks noGrp="1" noRot="1" noChangeAspect="1"/>
+          </p:cNvSpPr>
+          <p:nvPr>
+            <p:ph type="sldImg"/>
+          </p:nvPr>
+        </p:nvSpPr>
+        <p:spPr/>
+      </p:sp>
+      <p:sp>
+        <p:nvSpPr>
+          <p:cNvPr id="3" name="Notes Placeholder 2"/>
+          <p:cNvSpPr>
+            <a:spLocks noGrp="1"/>
+          </p:cNvSpPr>
+          <p:nvPr>
+            <p:ph type="body" idx="1"/>
+          </p:nvPr>
+        </p:nvSpPr>
+        <p:spPr/>
+        <p:txBody>
+          <a:bodyPr/>
+          <a:lstStyle/>
+          <a:p>
+            <a:r>
+              <a:rPr lang="en-US" dirty="0"/>
+              <a:t/>
+            </a:r>
+            <a:endParaRPr lang="en-US" dirty="0"/>
+          </a:p>
+        </p:txBody>
+      </p:sp>
+      <p:sp>
+        <p:nvSpPr>
+          <p:cNvPr id="4" name="Slide Number Placeholder 3"/>
+          <p:cNvSpPr>
+            <a:spLocks noGrp="1"/>
+          </p:cNvSpPr>
+          <p:nvPr>
+            <p:ph type="sldNum" sz="quarter" idx="10"/>
+          </p:nvPr>
+        </p:nvSpPr>
+        <p:spPr/>
+        <p:txBody>
+          <a:bodyPr/>
+          <a:lstStyle/>
+          <a:p>
+            <a:fld id="{F7021451-1387-4CA6-816F-3879F97B5CBC}" type="slidenum">
+              <a:rPr lang="en-US"/>
+              <a:t>10</a:t>
             </a:fld>
             <a:endParaRPr lang="en-US"/>
           </a:p>
@@ -1764,7 +1853,7 @@
                 <a:ea typeface="Calibri" pitchFamily="34" charset="-122"/>
                 <a:cs typeface="Calibri" pitchFamily="34" charset="-120"/>
               </a:rPr>
-              <a:t>Make.com, Zapier, n8n, Webhooks, Agent SDK - וניצול מקסימלי של קלוד קוד</a:t>
+              <a:t>Make.com, Zapier, n8n, Webhooks, אבטחה, Agent SDK - וניצול מקסימלי של קלוד קוד</a:t>
             </a:r>
             <a:endParaRPr lang="en-US" sz="1800" dirty="0"/>
           </a:p>
@@ -1806,6 +1895,261 @@
               <a:t>האקדמיה ל-AI ופיתוח Fullstack  ·  מודול 5</a:t>
             </a:r>
             <a:endParaRPr lang="en-US" sz="1200" dirty="0"/>
+          </a:p>
+        </p:txBody>
+      </p:sp>
+    </p:spTree>
+  </p:cSld>
+  <p:clrMapOvr>
+    <a:masterClrMapping/>
+  </p:clrMapOvr>
+</p:sld>
+</file>
+
+<file path=ppt/slides/slide10.xml><?xml version="1.0" encoding="utf-8"?>
+<p:sld xmlns:a="http://schemas.openxmlformats.org/drawingml/2006/main" xmlns:r="http://schemas.openxmlformats.org/officeDocument/2006/relationships" xmlns:p="http://schemas.openxmlformats.org/presentationml/2006/main">
+  <p:cSld name="Slide 10">
+    <p:bg>
+      <p:bgPr>
+        <a:solidFill>
+          <a:srgbClr val="0B1930"/>
+        </a:solidFill>
+      </p:bgPr>
+    </p:bg>
+    <p:spTree>
+      <p:nvGrpSpPr>
+        <p:cNvPr id="1" name=""/>
+        <p:cNvGrpSpPr/>
+        <p:nvPr/>
+      </p:nvGrpSpPr>
+      <p:grpSpPr>
+        <a:xfrm>
+          <a:off x="0" y="0"/>
+          <a:ext cx="0" cy="0"/>
+          <a:chOff x="0" y="0"/>
+          <a:chExt cx="0" cy="0"/>
+        </a:xfrm>
+      </p:grpSpPr>
+      <p:sp>
+        <p:nvSpPr>
+          <p:cNvPr id="2" name="Shape 0"/>
+          <p:cNvSpPr/>
+          <p:nvPr/>
+        </p:nvSpPr>
+        <p:spPr>
+          <a:xfrm>
+            <a:off x="-1828800" y="-1828800"/>
+            <a:ext cx="5486400" cy="5486400"/>
+          </a:xfrm>
+          <a:prstGeom prst="ellipse">
+            <a:avLst/>
+          </a:prstGeom>
+          <a:solidFill>
+            <a:srgbClr val="065A82">
+              <a:alpha val="35000"/>
+            </a:srgbClr>
+          </a:solidFill>
+          <a:ln/>
+        </p:spPr>
+      </p:sp>
+      <p:sp>
+        <p:nvSpPr>
+          <p:cNvPr id="3" name="Shape 1"/>
+          <p:cNvSpPr/>
+          <p:nvPr/>
+        </p:nvSpPr>
+        <p:spPr>
+          <a:xfrm>
+            <a:off x="731520" y="1371600"/>
+            <a:ext cx="1005840" cy="1005840"/>
+          </a:xfrm>
+          <a:prstGeom prst="ellipse">
+            <a:avLst/>
+          </a:prstGeom>
+          <a:solidFill>
+            <a:srgbClr val="2ECC71"/>
+          </a:solidFill>
+          <a:ln/>
+        </p:spPr>
+      </p:sp>
+      <p:sp>
+        <p:nvSpPr>
+          <p:cNvPr id="4" name="Text 2"/>
+          <p:cNvSpPr/>
+          <p:nvPr/>
+        </p:nvSpPr>
+        <p:spPr>
+          <a:xfrm>
+            <a:off x="731520" y="1371600"/>
+            <a:ext cx="1005840" cy="1005840"/>
+          </a:xfrm>
+          <a:prstGeom prst="rect">
+            <a:avLst/>
+          </a:prstGeom>
+          <a:noFill/>
+          <a:ln/>
+        </p:spPr>
+        <p:txBody>
+          <a:bodyPr wrap="square" lIns="0" tIns="0" rIns="0" bIns="0" rtlCol="0" anchor="ctr"/>
+          <a:lstStyle/>
+          <a:p>
+            <a:pPr algn="ctr" indent="0" marL="0">
+              <a:buNone/>
+            </a:pPr>
+            <a:r>
+              <a:rPr lang="en-US" sz="3400" b="1" dirty="0">
+                <a:solidFill>
+                  <a:srgbClr val="FFFFFF"/>
+                </a:solidFill>
+                <a:latin typeface="Calibri" pitchFamily="34" charset="0"/>
+                <a:ea typeface="Calibri" pitchFamily="34" charset="-122"/>
+                <a:cs typeface="Calibri" pitchFamily="34" charset="-120"/>
+              </a:rPr>
+              <a:t>✓</a:t>
+            </a:r>
+            <a:endParaRPr lang="en-US" sz="3400" dirty="0"/>
+          </a:p>
+        </p:txBody>
+      </p:sp>
+      <p:sp>
+        <p:nvSpPr>
+          <p:cNvPr id="5" name="Text 3"/>
+          <p:cNvSpPr/>
+          <p:nvPr/>
+        </p:nvSpPr>
+        <p:spPr>
+          <a:xfrm>
+            <a:off x="731520" y="2651760"/>
+            <a:ext cx="10698480" cy="1005840"/>
+          </a:xfrm>
+          <a:prstGeom prst="rect">
+            <a:avLst/>
+          </a:prstGeom>
+          <a:noFill/>
+          <a:ln/>
+        </p:spPr>
+        <p:txBody>
+          <a:bodyPr wrap="square" rtlCol="0" anchor="ctr"/>
+          <a:lstStyle/>
+          <a:p>
+            <a:pPr algn="r" indent="0" marL="0">
+              <a:buNone/>
+            </a:pPr>
+            <a:r>
+              <a:rPr lang="en-US" sz="3200" b="1" dirty="0">
+                <a:solidFill>
+                  <a:srgbClr val="FFFFFF"/>
+                </a:solidFill>
+                <a:latin typeface="Cambria" pitchFamily="34" charset="0"/>
+                <a:ea typeface="Cambria" pitchFamily="34" charset="-122"/>
+                <a:cs typeface="Cambria" pitchFamily="34" charset="-120"/>
+              </a:rPr>
+              <a:t>מהטכנולוגיה לעסק אמיתי</a:t>
+            </a:r>
+            <a:endParaRPr lang="en-US" sz="3200" dirty="0"/>
+          </a:p>
+        </p:txBody>
+      </p:sp>
+      <p:sp>
+        <p:nvSpPr>
+          <p:cNvPr id="6" name="Text 4"/>
+          <p:cNvSpPr/>
+          <p:nvPr/>
+        </p:nvSpPr>
+        <p:spPr>
+          <a:xfrm>
+            <a:off x="731520" y="3657600"/>
+            <a:ext cx="10149840" cy="1188720"/>
+          </a:xfrm>
+          <a:prstGeom prst="rect">
+            <a:avLst/>
+          </a:prstGeom>
+          <a:noFill/>
+          <a:ln/>
+        </p:spPr>
+        <p:txBody>
+          <a:bodyPr wrap="square" rtlCol="0" anchor="ctr"/>
+          <a:lstStyle/>
+          <a:p>
+            <a:pPr algn="r" indent="0" marL="0">
+              <a:lnSpc>
+                <a:spcPct val="130000"/>
+              </a:lnSpc>
+              <a:buNone/>
+            </a:pPr>
+            <a:r>
+              <a:rPr lang="en-US" sz="1600" dirty="0">
+                <a:solidFill>
+                  <a:srgbClr val="CADCFC"/>
+                </a:solidFill>
+                <a:latin typeface="Calibri" pitchFamily="34" charset="0"/>
+                <a:ea typeface="Calibri" pitchFamily="34" charset="-122"/>
+                <a:cs typeface="Calibri" pitchFamily="34" charset="-120"/>
+              </a:rPr>
+              <a:t>הבנתם AI, בניתם סוכנים, תכנתם Fullstack, וחיברתם הכל לאוטומציות מאובטחות. השלב הבא: מודול 6 - איך הופכים את הידע הזה לעסק אוטומציות AI אמיתי.</a:t>
+            </a:r>
+            <a:endParaRPr lang="en-US" sz="1600" dirty="0"/>
+          </a:p>
+        </p:txBody>
+      </p:sp>
+      <p:sp>
+        <p:nvSpPr>
+          <p:cNvPr id="7" name="Shape 5"/>
+          <p:cNvSpPr/>
+          <p:nvPr/>
+        </p:nvSpPr>
+        <p:spPr>
+          <a:xfrm>
+            <a:off x="5029200" y="5120640"/>
+            <a:ext cx="6400800" cy="822960"/>
+          </a:xfrm>
+          <a:prstGeom prst="roundRect">
+            <a:avLst>
+              <a:gd name="adj" fmla="val 50000"/>
+            </a:avLst>
+          </a:prstGeom>
+          <a:solidFill>
+            <a:srgbClr val="1C7293"/>
+          </a:solidFill>
+          <a:ln/>
+        </p:spPr>
+      </p:sp>
+      <p:sp>
+        <p:nvSpPr>
+          <p:cNvPr id="8" name="Text 6"/>
+          <p:cNvSpPr/>
+          <p:nvPr/>
+        </p:nvSpPr>
+        <p:spPr>
+          <a:xfrm>
+            <a:off x="5029200" y="5120640"/>
+            <a:ext cx="6400800" cy="822960"/>
+          </a:xfrm>
+          <a:prstGeom prst="rect">
+            <a:avLst/>
+          </a:prstGeom>
+          <a:noFill/>
+          <a:ln/>
+        </p:spPr>
+        <p:txBody>
+          <a:bodyPr wrap="square" lIns="0" tIns="0" rIns="0" bIns="0" rtlCol="0" anchor="ctr"/>
+          <a:lstStyle/>
+          <a:p>
+            <a:pPr algn="ctr" indent="0" marL="0">
+              <a:buNone/>
+            </a:pPr>
+            <a:r>
+              <a:rPr lang="en-US" sz="1500" b="1" dirty="0">
+                <a:solidFill>
+                  <a:srgbClr val="FFFFFF"/>
+                </a:solidFill>
+                <a:latin typeface="Calibri" pitchFamily="34" charset="0"/>
+                <a:ea typeface="Calibri" pitchFamily="34" charset="-122"/>
+                <a:cs typeface="Calibri" pitchFamily="34" charset="-120"/>
+              </a:rPr>
+              <a:t>מודול 6: בניית עסק אוטומציות AI ←</a:t>
+            </a:r>
+            <a:endParaRPr lang="en-US" sz="1500" dirty="0"/>
           </a:p>
         </p:txBody>
       </p:sp>
@@ -2520,7 +2864,7 @@
                 <a:ea typeface="Calibri" pitchFamily="34" charset="-122"/>
                 <a:cs typeface="Calibri" pitchFamily="34" charset="-120"/>
               </a:rPr>
-              <a:t>Agent SDK</a:t>
+              <a:t>אבטחה</a:t>
             </a:r>
             <a:endParaRPr lang="en-US" sz="1400" dirty="0"/>
           </a:p>
@@ -2559,7 +2903,7 @@
                 <a:ea typeface="Calibri" pitchFamily="34" charset="-122"/>
                 <a:cs typeface="Calibri" pitchFamily="34" charset="-120"/>
               </a:rPr>
-              <a:t>הסוכן עצמו כמנוע</a:t>
+              <a:t>HMAC, סודות, הרשאות</a:t>
             </a:r>
             <a:endParaRPr lang="en-US" sz="1100" dirty="0"/>
           </a:p>
@@ -2657,7 +3001,7 @@
                 <a:ea typeface="Calibri" pitchFamily="34" charset="-122"/>
                 <a:cs typeface="Calibri" pitchFamily="34" charset="-120"/>
               </a:rPr>
-              <a:t>ניצול מקסימלי</a:t>
+              <a:t>Agent SDK</a:t>
             </a:r>
             <a:endParaRPr lang="en-US" sz="1400" dirty="0"/>
           </a:p>
@@ -2696,7 +3040,7 @@
                 <a:ea typeface="Calibri" pitchFamily="34" charset="-122"/>
                 <a:cs typeface="Calibri" pitchFamily="34" charset="-120"/>
               </a:rPr>
-              <a:t>איך עובדים נכון עם קלוד קוד</a:t>
+              <a:t>הסוכן עצמו כמנוע</a:t>
             </a:r>
             <a:endParaRPr lang="en-US" sz="1100" dirty="0"/>
           </a:p>
@@ -2794,6 +3138,143 @@
                 <a:ea typeface="Calibri" pitchFamily="34" charset="-122"/>
                 <a:cs typeface="Calibri" pitchFamily="34" charset="-120"/>
               </a:rPr>
+              <a:t>ניצול מקסימלי</a:t>
+            </a:r>
+            <a:endParaRPr lang="en-US" sz="1400" dirty="0"/>
+          </a:p>
+        </p:txBody>
+      </p:sp>
+      <p:sp>
+        <p:nvSpPr>
+          <p:cNvPr id="30" name="Text 28"/>
+          <p:cNvSpPr/>
+          <p:nvPr/>
+        </p:nvSpPr>
+        <p:spPr>
+          <a:xfrm>
+            <a:off x="6263640" y="4864608"/>
+            <a:ext cx="4526280" cy="365760"/>
+          </a:xfrm>
+          <a:prstGeom prst="rect">
+            <a:avLst/>
+          </a:prstGeom>
+          <a:noFill/>
+          <a:ln/>
+        </p:spPr>
+        <p:txBody>
+          <a:bodyPr wrap="square" lIns="0" tIns="0" rIns="0" bIns="0" rtlCol="0" anchor="ctr"/>
+          <a:lstStyle/>
+          <a:p>
+            <a:pPr algn="r" indent="0" marL="0">
+              <a:buNone/>
+            </a:pPr>
+            <a:r>
+              <a:rPr lang="en-US" sz="1100" dirty="0">
+                <a:solidFill>
+                  <a:srgbClr val="5A6B7D"/>
+                </a:solidFill>
+                <a:latin typeface="Calibri" pitchFamily="34" charset="0"/>
+                <a:ea typeface="Calibri" pitchFamily="34" charset="-122"/>
+                <a:cs typeface="Calibri" pitchFamily="34" charset="-120"/>
+              </a:rPr>
+              <a:t>איך עובדים נכון עם קלוד קוד</a:t>
+            </a:r>
+            <a:endParaRPr lang="en-US" sz="1100" dirty="0"/>
+          </a:p>
+        </p:txBody>
+      </p:sp>
+      <p:sp>
+        <p:nvSpPr>
+          <p:cNvPr id="31" name="Shape 29"/>
+          <p:cNvSpPr/>
+          <p:nvPr/>
+        </p:nvSpPr>
+        <p:spPr>
+          <a:xfrm>
+            <a:off x="5394960" y="4572000"/>
+            <a:ext cx="502920" cy="502920"/>
+          </a:xfrm>
+          <a:prstGeom prst="ellipse">
+            <a:avLst/>
+          </a:prstGeom>
+          <a:solidFill>
+            <a:srgbClr val="065A82"/>
+          </a:solidFill>
+          <a:ln/>
+        </p:spPr>
+      </p:sp>
+      <p:sp>
+        <p:nvSpPr>
+          <p:cNvPr id="32" name="Text 30"/>
+          <p:cNvSpPr/>
+          <p:nvPr/>
+        </p:nvSpPr>
+        <p:spPr>
+          <a:xfrm>
+            <a:off x="5394960" y="4572000"/>
+            <a:ext cx="502920" cy="502920"/>
+          </a:xfrm>
+          <a:prstGeom prst="rect">
+            <a:avLst/>
+          </a:prstGeom>
+          <a:noFill/>
+          <a:ln/>
+        </p:spPr>
+        <p:txBody>
+          <a:bodyPr wrap="square" lIns="0" tIns="0" rIns="0" bIns="0" rtlCol="0" anchor="ctr"/>
+          <a:lstStyle/>
+          <a:p>
+            <a:pPr algn="ctr" indent="0" marL="0">
+              <a:buNone/>
+            </a:pPr>
+            <a:r>
+              <a:rPr lang="en-US" sz="1600" b="1" dirty="0">
+                <a:solidFill>
+                  <a:srgbClr val="FFFFFF"/>
+                </a:solidFill>
+                <a:latin typeface="Calibri" pitchFamily="34" charset="0"/>
+                <a:ea typeface="Calibri" pitchFamily="34" charset="-122"/>
+                <a:cs typeface="Calibri" pitchFamily="34" charset="-120"/>
+              </a:rPr>
+              <a:t>8</a:t>
+            </a:r>
+            <a:endParaRPr lang="en-US" sz="1600" dirty="0"/>
+          </a:p>
+        </p:txBody>
+      </p:sp>
+      <p:sp>
+        <p:nvSpPr>
+          <p:cNvPr id="33" name="Text 31"/>
+          <p:cNvSpPr/>
+          <p:nvPr/>
+        </p:nvSpPr>
+        <p:spPr>
+          <a:xfrm>
+            <a:off x="731520" y="4517136"/>
+            <a:ext cx="4526280" cy="365760"/>
+          </a:xfrm>
+          <a:prstGeom prst="rect">
+            <a:avLst/>
+          </a:prstGeom>
+          <a:noFill/>
+          <a:ln/>
+        </p:spPr>
+        <p:txBody>
+          <a:bodyPr wrap="square" lIns="0" tIns="0" rIns="0" bIns="0" rtlCol="0" anchor="ctr"/>
+          <a:lstStyle/>
+          <a:p>
+            <a:pPr algn="r" indent="0" marL="0">
+              <a:buNone/>
+            </a:pPr>
+            <a:r>
+              <a:rPr lang="en-US" sz="1400" b="1" dirty="0">
+                <a:solidFill>
+                  <a:srgbClr val="1B2430"/>
+                </a:solidFill>
+                <a:latin typeface="Calibri" pitchFamily="34" charset="0"/>
+                <a:ea typeface="Calibri" pitchFamily="34" charset="-122"/>
+                <a:cs typeface="Calibri" pitchFamily="34" charset="-120"/>
+              </a:rPr>
               <a:t>פרויקט מסכם</a:t>
             </a:r>
             <a:endParaRPr lang="en-US" sz="1400" dirty="0"/>
@@ -2802,13 +3283,13 @@
       </p:sp>
       <p:sp>
         <p:nvSpPr>
-          <p:cNvPr id="30" name="Text 28"/>
-          <p:cNvSpPr/>
-          <p:nvPr/>
-        </p:nvSpPr>
-        <p:spPr>
-          <a:xfrm>
-            <a:off x="6263640" y="4864608"/>
+          <p:cNvPr id="34" name="Text 32"/>
+          <p:cNvSpPr/>
+          <p:nvPr/>
+        </p:nvSpPr>
+        <p:spPr>
+          <a:xfrm>
+            <a:off x="731520" y="4864608"/>
             <a:ext cx="4526280" cy="365760"/>
           </a:xfrm>
           <a:prstGeom prst="rect">
@@ -4712,7 +5193,7 @@
     <p:bg>
       <p:bgPr>
         <a:solidFill>
-          <a:srgbClr val="FFFFFF"/>
+          <a:srgbClr val="F4F8FB"/>
         </a:solidFill>
       </p:bgPr>
     </p:bg>
@@ -4745,7 +5226,7 @@
             <a:avLst/>
           </a:prstGeom>
           <a:solidFill>
-            <a:srgbClr val="065A82"/>
+            <a:srgbClr val="2ECC71"/>
           </a:solidFill>
           <a:ln/>
         </p:spPr>
@@ -4797,8 +5278,8 @@
         </p:nvSpPr>
         <p:spPr>
           <a:xfrm>
-            <a:off x="2560320" y="502920"/>
-            <a:ext cx="8138160" cy="457200"/>
+            <a:off x="3200400" y="502920"/>
+            <a:ext cx="7498080" cy="457200"/>
           </a:xfrm>
           <a:prstGeom prst="rect">
             <a:avLst/>
@@ -4822,7 +5303,7 @@
                 <a:ea typeface="Cambria" pitchFamily="34" charset="-122"/>
                 <a:cs typeface="Cambria" pitchFamily="34" charset="-120"/>
               </a:rPr>
-              <a:t>Claude Agent SDK כמנוע</a:t>
+              <a:t>אבטחת אוטומציות</a:t>
             </a:r>
             <a:endParaRPr lang="en-US" sz="2400" dirty="0"/>
           </a:p>
@@ -4836,8 +5317,8 @@
         </p:nvSpPr>
         <p:spPr>
           <a:xfrm>
-            <a:off x="2560320" y="896112"/>
-            <a:ext cx="8138160" cy="320040"/>
+            <a:off x="3200400" y="896112"/>
+            <a:ext cx="7498080" cy="274320"/>
           </a:xfrm>
           <a:prstGeom prst="rect">
             <a:avLst/>
@@ -4853,30 +5334,421 @@
               <a:buNone/>
             </a:pPr>
             <a:r>
-              <a:rPr lang="en-US" sz="1100" b="1" dirty="0">
+              <a:rPr lang="en-US" sz="1000" b="1" dirty="0">
                 <a:solidFill>
                   <a:srgbClr val="1C7293"/>
                 </a:solidFill>
-                <a:latin typeface="Calibri" pitchFamily="34" charset="0"/>
-                <a:ea typeface="Calibri" pitchFamily="34" charset="-122"/>
-                <a:cs typeface="Calibri" pitchFamily="34" charset="-120"/>
-              </a:rPr>
-              <a:t>הסוכן מחליט, לא רק מבצע</a:t>
-            </a:r>
-            <a:endParaRPr lang="en-US" sz="1100" dirty="0"/>
-          </a:p>
-        </p:txBody>
-      </p:sp>
-      <p:sp>
-        <p:nvSpPr>
-          <p:cNvPr id="6" name="Text 4"/>
-          <p:cNvSpPr/>
-          <p:nvPr/>
-        </p:nvSpPr>
-        <p:spPr>
-          <a:xfrm>
-            <a:off x="4709160" y="1508760"/>
-            <a:ext cx="6492240" cy="4846320"/>
+                <a:latin typeface="Courier New" pitchFamily="34" charset="0"/>
+                <a:ea typeface="Courier New" pitchFamily="34" charset="-122"/>
+                <a:cs typeface="Courier New" pitchFamily="34" charset="-120"/>
+              </a:rPr>
+              <a:t>verify_signature.py</a:t>
+            </a:r>
+            <a:endParaRPr lang="en-US" sz="1000" dirty="0"/>
+          </a:p>
+        </p:txBody>
+      </p:sp>
+      <p:sp>
+        <p:nvSpPr>
+          <p:cNvPr id="6" name="Shape 4"/>
+          <p:cNvSpPr/>
+          <p:nvPr/>
+        </p:nvSpPr>
+        <p:spPr>
+          <a:xfrm>
+            <a:off x="4480560" y="1417320"/>
+            <a:ext cx="6766560" cy="4937760"/>
+          </a:xfrm>
+          <a:prstGeom prst="roundRect">
+            <a:avLst>
+              <a:gd name="adj" fmla="val 1852"/>
+            </a:avLst>
+          </a:prstGeom>
+          <a:solidFill>
+            <a:srgbClr val="1E2233"/>
+          </a:solidFill>
+          <a:ln/>
+        </p:spPr>
+      </p:sp>
+      <p:sp>
+        <p:nvSpPr>
+          <p:cNvPr id="7" name="Text 5"/>
+          <p:cNvSpPr/>
+          <p:nvPr/>
+        </p:nvSpPr>
+        <p:spPr>
+          <a:xfrm>
+            <a:off x="4709160" y="1600200"/>
+            <a:ext cx="6309360" cy="4572000"/>
+          </a:xfrm>
+          <a:prstGeom prst="rect">
+            <a:avLst/>
+          </a:prstGeom>
+          <a:noFill/>
+          <a:ln/>
+        </p:spPr>
+        <p:txBody>
+          <a:bodyPr wrap="square" lIns="0" tIns="0" rIns="0" bIns="0" rtlCol="0" anchor="t"/>
+          <a:lstStyle/>
+          <a:p>
+            <a:pPr algn="l" indent="0" marL="0">
+              <a:lnSpc>
+                <a:spcPct val="130000"/>
+              </a:lnSpc>
+              <a:buNone/>
+            </a:pPr>
+            <a:r>
+              <a:rPr lang="en-US" sz="1150" dirty="0">
+                <a:solidFill>
+                  <a:srgbClr val="D7DCFF"/>
+                </a:solidFill>
+                <a:latin typeface="Courier New" pitchFamily="34" charset="0"/>
+                <a:ea typeface="Courier New" pitchFamily="34" charset="-122"/>
+                <a:cs typeface="Courier New" pitchFamily="34" charset="-120"/>
+              </a:rPr>
+              <a:t>import hmac, hashlib</a:t>
+            </a:r>
+            <a:endParaRPr lang="en-US" sz="1150" dirty="0"/>
+          </a:p>
+          <a:p>
+            <a:pPr algn="l" indent="0" marL="0">
+              <a:lnSpc>
+                <a:spcPct val="130000"/>
+              </a:lnSpc>
+              <a:buNone/>
+            </a:pPr>
+            <a:endParaRPr lang="en-US" sz="1150" dirty="0"/>
+          </a:p>
+          <a:p>
+            <a:pPr algn="l" indent="0" marL="0">
+              <a:lnSpc>
+                <a:spcPct val="130000"/>
+              </a:lnSpc>
+              <a:buNone/>
+            </a:pPr>
+            <a:r>
+              <a:rPr lang="en-US" sz="1150" dirty="0">
+                <a:solidFill>
+                  <a:srgbClr val="D7DCFF"/>
+                </a:solidFill>
+                <a:latin typeface="Courier New" pitchFamily="34" charset="0"/>
+                <a:ea typeface="Courier New" pitchFamily="34" charset="-122"/>
+                <a:cs typeface="Courier New" pitchFamily="34" charset="-120"/>
+              </a:rPr>
+              <a:t>SECRET = os.environ[</a:t>
+            </a:r>
+            <a:endParaRPr lang="en-US" sz="1150" dirty="0"/>
+          </a:p>
+          <a:p>
+            <a:pPr algn="l" indent="0" marL="0">
+              <a:lnSpc>
+                <a:spcPct val="130000"/>
+              </a:lnSpc>
+              <a:buNone/>
+            </a:pPr>
+            <a:r>
+              <a:rPr lang="en-US" sz="1150" dirty="0">
+                <a:solidFill>
+                  <a:srgbClr val="D7DCFF"/>
+                </a:solidFill>
+                <a:latin typeface="Courier New" pitchFamily="34" charset="0"/>
+                <a:ea typeface="Courier New" pitchFamily="34" charset="-122"/>
+                <a:cs typeface="Courier New" pitchFamily="34" charset="-120"/>
+              </a:rPr>
+              <a:t>  "WEBHOOK_SECRET"]</a:t>
+            </a:r>
+            <a:endParaRPr lang="en-US" sz="1150" dirty="0"/>
+          </a:p>
+          <a:p>
+            <a:pPr algn="l" indent="0" marL="0">
+              <a:lnSpc>
+                <a:spcPct val="130000"/>
+              </a:lnSpc>
+              <a:buNone/>
+            </a:pPr>
+            <a:endParaRPr lang="en-US" sz="1150" dirty="0"/>
+          </a:p>
+          <a:p>
+            <a:pPr algn="l" indent="0" marL="0">
+              <a:lnSpc>
+                <a:spcPct val="130000"/>
+              </a:lnSpc>
+              <a:buNone/>
+            </a:pPr>
+            <a:r>
+              <a:rPr lang="en-US" sz="1150" dirty="0">
+                <a:solidFill>
+                  <a:srgbClr val="D7DCFF"/>
+                </a:solidFill>
+                <a:latin typeface="Courier New" pitchFamily="34" charset="0"/>
+                <a:ea typeface="Courier New" pitchFamily="34" charset="-122"/>
+                <a:cs typeface="Courier New" pitchFamily="34" charset="-120"/>
+              </a:rPr>
+              <a:t>def verify(payload, sig_header):</a:t>
+            </a:r>
+            <a:endParaRPr lang="en-US" sz="1150" dirty="0"/>
+          </a:p>
+          <a:p>
+            <a:pPr algn="l" indent="0" marL="0">
+              <a:lnSpc>
+                <a:spcPct val="130000"/>
+              </a:lnSpc>
+              <a:buNone/>
+            </a:pPr>
+            <a:r>
+              <a:rPr lang="en-US" sz="1150" dirty="0">
+                <a:solidFill>
+                  <a:srgbClr val="D7DCFF"/>
+                </a:solidFill>
+                <a:latin typeface="Courier New" pitchFamily="34" charset="0"/>
+                <a:ea typeface="Courier New" pitchFamily="34" charset="-122"/>
+                <a:cs typeface="Courier New" pitchFamily="34" charset="-120"/>
+              </a:rPr>
+              <a:t>    expected = hmac.new(</a:t>
+            </a:r>
+            <a:endParaRPr lang="en-US" sz="1150" dirty="0"/>
+          </a:p>
+          <a:p>
+            <a:pPr algn="l" indent="0" marL="0">
+              <a:lnSpc>
+                <a:spcPct val="130000"/>
+              </a:lnSpc>
+              <a:buNone/>
+            </a:pPr>
+            <a:r>
+              <a:rPr lang="en-US" sz="1150" dirty="0">
+                <a:solidFill>
+                  <a:srgbClr val="D7DCFF"/>
+                </a:solidFill>
+                <a:latin typeface="Courier New" pitchFamily="34" charset="0"/>
+                <a:ea typeface="Courier New" pitchFamily="34" charset="-122"/>
+                <a:cs typeface="Courier New" pitchFamily="34" charset="-120"/>
+              </a:rPr>
+              <a:t>        SECRET.encode(),</a:t>
+            </a:r>
+            <a:endParaRPr lang="en-US" sz="1150" dirty="0"/>
+          </a:p>
+          <a:p>
+            <a:pPr algn="l" indent="0" marL="0">
+              <a:lnSpc>
+                <a:spcPct val="130000"/>
+              </a:lnSpc>
+              <a:buNone/>
+            </a:pPr>
+            <a:r>
+              <a:rPr lang="en-US" sz="1150" dirty="0">
+                <a:solidFill>
+                  <a:srgbClr val="D7DCFF"/>
+                </a:solidFill>
+                <a:latin typeface="Courier New" pitchFamily="34" charset="0"/>
+                <a:ea typeface="Courier New" pitchFamily="34" charset="-122"/>
+                <a:cs typeface="Courier New" pitchFamily="34" charset="-120"/>
+              </a:rPr>
+              <a:t>        payload,</a:t>
+            </a:r>
+            <a:endParaRPr lang="en-US" sz="1150" dirty="0"/>
+          </a:p>
+          <a:p>
+            <a:pPr algn="l" indent="0" marL="0">
+              <a:lnSpc>
+                <a:spcPct val="130000"/>
+              </a:lnSpc>
+              <a:buNone/>
+            </a:pPr>
+            <a:r>
+              <a:rPr lang="en-US" sz="1150" dirty="0">
+                <a:solidFill>
+                  <a:srgbClr val="D7DCFF"/>
+                </a:solidFill>
+                <a:latin typeface="Courier New" pitchFamily="34" charset="0"/>
+                <a:ea typeface="Courier New" pitchFamily="34" charset="-122"/>
+                <a:cs typeface="Courier New" pitchFamily="34" charset="-120"/>
+              </a:rPr>
+              <a:t>        hashlib.sha256</a:t>
+            </a:r>
+            <a:endParaRPr lang="en-US" sz="1150" dirty="0"/>
+          </a:p>
+          <a:p>
+            <a:pPr algn="l" indent="0" marL="0">
+              <a:lnSpc>
+                <a:spcPct val="130000"/>
+              </a:lnSpc>
+              <a:buNone/>
+            </a:pPr>
+            <a:r>
+              <a:rPr lang="en-US" sz="1150" dirty="0">
+                <a:solidFill>
+                  <a:srgbClr val="D7DCFF"/>
+                </a:solidFill>
+                <a:latin typeface="Courier New" pitchFamily="34" charset="0"/>
+                <a:ea typeface="Courier New" pitchFamily="34" charset="-122"/>
+                <a:cs typeface="Courier New" pitchFamily="34" charset="-120"/>
+              </a:rPr>
+              <a:t>    ).hexdigest()</a:t>
+            </a:r>
+            <a:endParaRPr lang="en-US" sz="1150" dirty="0"/>
+          </a:p>
+          <a:p>
+            <a:pPr algn="l" indent="0" marL="0">
+              <a:lnSpc>
+                <a:spcPct val="130000"/>
+              </a:lnSpc>
+              <a:buNone/>
+            </a:pPr>
+            <a:r>
+              <a:rPr lang="en-US" sz="1150" dirty="0">
+                <a:solidFill>
+                  <a:srgbClr val="D7DCFF"/>
+                </a:solidFill>
+                <a:latin typeface="Courier New" pitchFamily="34" charset="0"/>
+                <a:ea typeface="Courier New" pitchFamily="34" charset="-122"/>
+                <a:cs typeface="Courier New" pitchFamily="34" charset="-120"/>
+              </a:rPr>
+              <a:t>    return hmac.compare_digest(</a:t>
+            </a:r>
+            <a:endParaRPr lang="en-US" sz="1150" dirty="0"/>
+          </a:p>
+          <a:p>
+            <a:pPr algn="l" indent="0" marL="0">
+              <a:lnSpc>
+                <a:spcPct val="130000"/>
+              </a:lnSpc>
+              <a:buNone/>
+            </a:pPr>
+            <a:r>
+              <a:rPr lang="en-US" sz="1150" dirty="0">
+                <a:solidFill>
+                  <a:srgbClr val="D7DCFF"/>
+                </a:solidFill>
+                <a:latin typeface="Courier New" pitchFamily="34" charset="0"/>
+                <a:ea typeface="Courier New" pitchFamily="34" charset="-122"/>
+                <a:cs typeface="Courier New" pitchFamily="34" charset="-120"/>
+              </a:rPr>
+              <a:t>        expected, sig_header)</a:t>
+            </a:r>
+            <a:endParaRPr lang="en-US" sz="1150" dirty="0"/>
+          </a:p>
+          <a:p>
+            <a:pPr algn="l" indent="0" marL="0">
+              <a:lnSpc>
+                <a:spcPct val="130000"/>
+              </a:lnSpc>
+              <a:buNone/>
+            </a:pPr>
+            <a:endParaRPr lang="en-US" sz="1150" dirty="0"/>
+          </a:p>
+          <a:p>
+            <a:pPr algn="l" indent="0" marL="0">
+              <a:lnSpc>
+                <a:spcPct val="130000"/>
+              </a:lnSpc>
+              <a:buNone/>
+            </a:pPr>
+            <a:r>
+              <a:rPr lang="en-US" sz="1150" dirty="0">
+                <a:solidFill>
+                  <a:srgbClr val="D7DCFF"/>
+                </a:solidFill>
+                <a:latin typeface="Courier New" pitchFamily="34" charset="0"/>
+                <a:ea typeface="Courier New" pitchFamily="34" charset="-122"/>
+                <a:cs typeface="Courier New" pitchFamily="34" charset="-120"/>
+              </a:rPr>
+              <a:t>if not verify(</a:t>
+            </a:r>
+            <a:endParaRPr lang="en-US" sz="1150" dirty="0"/>
+          </a:p>
+          <a:p>
+            <a:pPr algn="l" indent="0" marL="0">
+              <a:lnSpc>
+                <a:spcPct val="130000"/>
+              </a:lnSpc>
+              <a:buNone/>
+            </a:pPr>
+            <a:r>
+              <a:rPr lang="en-US" sz="1150" dirty="0">
+                <a:solidFill>
+                  <a:srgbClr val="D7DCFF"/>
+                </a:solidFill>
+                <a:latin typeface="Courier New" pitchFamily="34" charset="0"/>
+                <a:ea typeface="Courier New" pitchFamily="34" charset="-122"/>
+                <a:cs typeface="Courier New" pitchFamily="34" charset="-120"/>
+              </a:rPr>
+              <a:t>  request.body,</a:t>
+            </a:r>
+            <a:endParaRPr lang="en-US" sz="1150" dirty="0"/>
+          </a:p>
+          <a:p>
+            <a:pPr algn="l" indent="0" marL="0">
+              <a:lnSpc>
+                <a:spcPct val="130000"/>
+              </a:lnSpc>
+              <a:buNone/>
+            </a:pPr>
+            <a:r>
+              <a:rPr lang="en-US" sz="1150" dirty="0">
+                <a:solidFill>
+                  <a:srgbClr val="D7DCFF"/>
+                </a:solidFill>
+                <a:latin typeface="Courier New" pitchFamily="34" charset="0"/>
+                <a:ea typeface="Courier New" pitchFamily="34" charset="-122"/>
+                <a:cs typeface="Courier New" pitchFamily="34" charset="-120"/>
+              </a:rPr>
+              <a:t>  request.headers["X-Signature"]</a:t>
+            </a:r>
+            <a:endParaRPr lang="en-US" sz="1150" dirty="0"/>
+          </a:p>
+          <a:p>
+            <a:pPr algn="l" indent="0" marL="0">
+              <a:lnSpc>
+                <a:spcPct val="130000"/>
+              </a:lnSpc>
+              <a:buNone/>
+            </a:pPr>
+            <a:r>
+              <a:rPr lang="en-US" sz="1150" dirty="0">
+                <a:solidFill>
+                  <a:srgbClr val="D7DCFF"/>
+                </a:solidFill>
+                <a:latin typeface="Courier New" pitchFamily="34" charset="0"/>
+                <a:ea typeface="Courier New" pitchFamily="34" charset="-122"/>
+                <a:cs typeface="Courier New" pitchFamily="34" charset="-120"/>
+              </a:rPr>
+              <a:t>):</a:t>
+            </a:r>
+            <a:endParaRPr lang="en-US" sz="1150" dirty="0"/>
+          </a:p>
+          <a:p>
+            <a:pPr algn="l" indent="0" marL="0">
+              <a:lnSpc>
+                <a:spcPct val="130000"/>
+              </a:lnSpc>
+              <a:buNone/>
+            </a:pPr>
+            <a:r>
+              <a:rPr lang="en-US" sz="1150" dirty="0">
+                <a:solidFill>
+                  <a:srgbClr val="D7DCFF"/>
+                </a:solidFill>
+                <a:latin typeface="Courier New" pitchFamily="34" charset="0"/>
+                <a:ea typeface="Courier New" pitchFamily="34" charset="-122"/>
+                <a:cs typeface="Courier New" pitchFamily="34" charset="-120"/>
+              </a:rPr>
+              <a:t>    return Response(status=401)</a:t>
+            </a:r>
+            <a:endParaRPr lang="en-US" sz="1150" dirty="0"/>
+          </a:p>
+        </p:txBody>
+      </p:sp>
+      <p:sp>
+        <p:nvSpPr>
+          <p:cNvPr id="8" name="Text 6"/>
+          <p:cNvSpPr/>
+          <p:nvPr/>
+        </p:nvSpPr>
+        <p:spPr>
+          <a:xfrm>
+            <a:off x="411480" y="1508760"/>
+            <a:ext cx="3840480" cy="4846320"/>
           </a:xfrm>
           <a:prstGeom prst="rect">
             <a:avLst/>
@@ -4888,15 +5760,15 @@
           <a:bodyPr wrap="square" rtlCol="0" anchor="t"/>
           <a:lstStyle/>
           <a:p>
-            <a:pPr rtl="1" algn="r" marL="342900" indent="-342900">
+            <a:pPr algn="r" marL="342900" indent="-342900">
               <a:spcAft>
-                <a:spcPts val="1200"/>
+                <a:spcPts val="1400"/>
               </a:spcAft>
               <a:buSzPct val="100000"/>
               <a:buChar char="▪"/>
             </a:pPr>
             <a:r>
-              <a:rPr lang="en-US" sz="1500" dirty="0">
+              <a:rPr lang="en-US" sz="1350" dirty="0">
                 <a:solidFill>
                   <a:srgbClr val="1B2430"/>
                 </a:solidFill>
@@ -4904,20 +5776,20 @@
                 <a:ea typeface="Calibri" pitchFamily="34" charset="-122"/>
                 <a:cs typeface="Calibri" pitchFamily="34" charset="-120"/>
               </a:rPr>
-              <a:t>לא רק תחנה בתרשים - סוכן שמריץ את הלולאה האג'נטית המלאה</a:t>
-            </a:r>
-            <a:endParaRPr lang="en-US" sz="1500" dirty="0"/>
-          </a:p>
-          <a:p>
-            <a:pPr rtl="1" algn="r" marL="342900" indent="-342900">
+              <a:t>HMAC מוודא שהבקשה הגיעה מהמקור האמיתי ולא זויפה</a:t>
+            </a:r>
+            <a:endParaRPr lang="en-US" sz="1350" dirty="0"/>
+          </a:p>
+          <a:p>
+            <a:pPr algn="r" marL="342900" indent="-342900">
               <a:spcAft>
-                <a:spcPts val="1200"/>
+                <a:spcPts val="1400"/>
               </a:spcAft>
               <a:buSzPct val="100000"/>
               <a:buChar char="▪"/>
             </a:pPr>
             <a:r>
-              <a:rPr lang="en-US" sz="1500" dirty="0">
+              <a:rPr lang="en-US" sz="1350" dirty="0">
                 <a:solidFill>
                   <a:srgbClr val="1B2430"/>
                 </a:solidFill>
@@ -4925,20 +5797,20 @@
                 <a:ea typeface="Calibri" pitchFamily="34" charset="-122"/>
                 <a:cs typeface="Calibri" pitchFamily="34" charset="-120"/>
               </a:rPr>
-              <a:t>בפלטפורמה: אתם מגדירים מראש. ב-Agent SDK: קלוד מחליט בזמן ריצה</a:t>
-            </a:r>
-            <a:endParaRPr lang="en-US" sz="1500" dirty="0"/>
-          </a:p>
-          <a:p>
-            <a:pPr rtl="1" algn="r" marL="342900" indent="-342900">
+              <a:t>compare_digest מונע timing attack - לעולם לא להשוות עם ==</a:t>
+            </a:r>
+            <a:endParaRPr lang="en-US" sz="1350" dirty="0"/>
+          </a:p>
+          <a:p>
+            <a:pPr algn="r" marL="342900" indent="-342900">
               <a:spcAft>
-                <a:spcPts val="1200"/>
+                <a:spcPts val="1400"/>
               </a:spcAft>
               <a:buSzPct val="100000"/>
               <a:buChar char="▪"/>
             </a:pPr>
             <a:r>
-              <a:rPr lang="en-US" sz="1500" dirty="0">
+              <a:rPr lang="en-US" sz="1350" dirty="0">
                 <a:solidFill>
                   <a:srgbClr val="1B2430"/>
                 </a:solidFill>
@@ -4946,131 +5818,7 @@
                 <a:ea typeface="Calibri" pitchFamily="34" charset="-122"/>
                 <a:cs typeface="Calibri" pitchFamily="34" charset="-120"/>
               </a:rPr>
-              <a:t>מתאים כשנדרש שיקול דעת אמיתי, לא רק כלל "אם X אז Y"</a:t>
-            </a:r>
-            <a:endParaRPr lang="en-US" sz="1500" dirty="0"/>
-          </a:p>
-          <a:p>
-            <a:pPr rtl="1" algn="r" marL="342900" indent="-342900">
-              <a:spcAft>
-                <a:spcPts val="1200"/>
-              </a:spcAft>
-              <a:buSzPct val="100000"/>
-              <a:buChar char="▪"/>
-            </a:pPr>
-            <a:r>
-              <a:rPr lang="en-US" sz="1500" dirty="0">
-                <a:solidFill>
-                  <a:srgbClr val="1B2430"/>
-                </a:solidFill>
-                <a:latin typeface="Calibri" pitchFamily="34" charset="0"/>
-                <a:ea typeface="Calibri" pitchFamily="34" charset="-122"/>
-                <a:cs typeface="Calibri" pitchFamily="34" charset="-120"/>
-              </a:rPr>
-              <a:t>שילוב עם תזמון (מודול 2) = סוכן שרץ ברקע לגמרי לבד</a:t>
-            </a:r>
-            <a:endParaRPr lang="en-US" sz="1500" dirty="0"/>
-          </a:p>
-        </p:txBody>
-      </p:sp>
-      <p:sp>
-        <p:nvSpPr>
-          <p:cNvPr id="7" name="Shape 5"/>
-          <p:cNvSpPr/>
-          <p:nvPr/>
-        </p:nvSpPr>
-        <p:spPr>
-          <a:xfrm>
-            <a:off x="411480" y="1508760"/>
-            <a:ext cx="3931920" cy="4846320"/>
-          </a:xfrm>
-          <a:prstGeom prst="roundRect">
-            <a:avLst>
-              <a:gd name="adj" fmla="val 2791"/>
-            </a:avLst>
-          </a:prstGeom>
-          <a:solidFill>
-            <a:srgbClr val="21295C"/>
-          </a:solidFill>
-          <a:ln/>
-        </p:spPr>
-      </p:sp>
-      <p:sp>
-        <p:nvSpPr>
-          <p:cNvPr id="8" name="Text 6"/>
-          <p:cNvSpPr/>
-          <p:nvPr/>
-        </p:nvSpPr>
-        <p:spPr>
-          <a:xfrm>
-            <a:off x="731520" y="1828800"/>
-            <a:ext cx="3291840" cy="320040"/>
-          </a:xfrm>
-          <a:prstGeom prst="rect">
-            <a:avLst/>
-          </a:prstGeom>
-          <a:noFill/>
-          <a:ln/>
-        </p:spPr>
-        <p:txBody>
-          <a:bodyPr wrap="square" lIns="0" tIns="0" rIns="0" bIns="0" rtlCol="0" anchor="ctr"/>
-          <a:lstStyle/>
-          <a:p>
-            <a:pPr algn="r" indent="0" marL="0">
-              <a:buNone/>
-            </a:pPr>
-            <a:r>
-              <a:rPr lang="en-US" sz="1100" b="1" dirty="0">
-                <a:solidFill>
-                  <a:srgbClr val="7FD9E8"/>
-                </a:solidFill>
-                <a:latin typeface="Calibri" pitchFamily="34" charset="0"/>
-                <a:ea typeface="Calibri" pitchFamily="34" charset="-122"/>
-                <a:cs typeface="Calibri" pitchFamily="34" charset="-120"/>
-              </a:rPr>
-              <a:t>מתי לבחור בזה</a:t>
-            </a:r>
-            <a:endParaRPr lang="en-US" sz="1100" dirty="0"/>
-          </a:p>
-        </p:txBody>
-      </p:sp>
-      <p:sp>
-        <p:nvSpPr>
-          <p:cNvPr id="9" name="Text 7"/>
-          <p:cNvSpPr/>
-          <p:nvPr/>
-        </p:nvSpPr>
-        <p:spPr>
-          <a:xfrm>
-            <a:off x="731520" y="2240280"/>
-            <a:ext cx="3337560" cy="3931920"/>
-          </a:xfrm>
-          <a:prstGeom prst="rect">
-            <a:avLst/>
-          </a:prstGeom>
-          <a:noFill/>
-          <a:ln/>
-        </p:spPr>
-        <p:txBody>
-          <a:bodyPr wrap="square" lIns="0" tIns="0" rIns="0" bIns="0" rtlCol="0" anchor="t"/>
-          <a:lstStyle/>
-          <a:p>
-            <a:pPr algn="r" indent="0" marL="0">
-              <a:lnSpc>
-                <a:spcPct val="125000"/>
-              </a:lnSpc>
-              <a:buNone/>
-            </a:pPr>
-            <a:r>
-              <a:rPr lang="en-US" sz="1350" i="1" dirty="0">
-                <a:solidFill>
-                  <a:srgbClr val="E8EEF5"/>
-                </a:solidFill>
-                <a:latin typeface="Calibri" pitchFamily="34" charset="0"/>
-                <a:ea typeface="Calibri" pitchFamily="34" charset="-122"/>
-                <a:cs typeface="Calibri" pitchFamily="34" charset="-120"/>
-              </a:rPr>
-              <a:t>כשבונים מוצר AI מלא, לא רק אוטומציה פנימית חד-פעמית.</a:t>
+              <a:t>סודות ב-env vars בלבד, לעולם לא בקוד; הרשאות מינימליות לכל שירות</a:t>
             </a:r>
             <a:endParaRPr lang="en-US" sz="1350" dirty="0"/>
           </a:p>
@@ -5200,7 +5948,7 @@
                 <a:ea typeface="Cambria" pitchFamily="34" charset="-122"/>
                 <a:cs typeface="Cambria" pitchFamily="34" charset="-120"/>
               </a:rPr>
-              <a:t>ניצול מקסימלי של קלוד קוד</a:t>
+              <a:t>Claude Agent SDK כמנוע</a:t>
             </a:r>
             <a:endParaRPr lang="en-US" sz="2400" dirty="0"/>
           </a:p>
@@ -5239,7 +5987,7 @@
                 <a:ea typeface="Calibri" pitchFamily="34" charset="-122"/>
                 <a:cs typeface="Calibri" pitchFamily="34" charset="-120"/>
               </a:rPr>
-              <a:t>CLAUDE.MD · PLAN MODE · SUBAGENTS</a:t>
+              <a:t>הסוכן מחליט, לא רק מבצע</a:t>
             </a:r>
             <a:endParaRPr lang="en-US" sz="1100" dirty="0"/>
           </a:p>
@@ -5282,7 +6030,7 @@
                 <a:ea typeface="Calibri" pitchFamily="34" charset="-122"/>
                 <a:cs typeface="Calibri" pitchFamily="34" charset="-120"/>
               </a:rPr>
-              <a:t>CLAUDE.md - זיכרון פרויקט קבוע: מבנה, מוסכמות, פקודות build/test</a:t>
+              <a:t>לא רק תחנה בתרשים - סוכן שמריץ את הלולאה האג'נטית המלאה</a:t>
             </a:r>
             <a:endParaRPr lang="en-US" sz="1500" dirty="0"/>
           </a:p>
@@ -5303,7 +6051,7 @@
                 <a:ea typeface="Calibri" pitchFamily="34" charset="-122"/>
                 <a:cs typeface="Calibri" pitchFamily="34" charset="-120"/>
               </a:rPr>
-              <a:t>Plan Mode לפני שינויים גדולים - מפחית טעויות יקרות</a:t>
+              <a:t>בפלטפורמה: אתם מגדירים מראש. ב-Agent SDK: קלוד מחליט בזמן ריצה</a:t>
             </a:r>
             <a:endParaRPr lang="en-US" sz="1500" dirty="0"/>
           </a:p>
@@ -5324,7 +6072,7 @@
                 <a:ea typeface="Calibri" pitchFamily="34" charset="-122"/>
                 <a:cs typeface="Calibri" pitchFamily="34" charset="-120"/>
               </a:rPr>
-              <a:t>Slash commands מותאמים הופכים זרימות חוזרות לקיצור דרך</a:t>
+              <a:t>מתאים כשנדרש שיקול דעת אמיתי, לא רק כלל "אם X אז Y"</a:t>
             </a:r>
             <a:endParaRPr lang="en-US" sz="1500" dirty="0"/>
           </a:p>
@@ -5345,7 +6093,7 @@
                 <a:ea typeface="Calibri" pitchFamily="34" charset="-122"/>
                 <a:cs typeface="Calibri" pitchFamily="34" charset="-120"/>
               </a:rPr>
-              <a:t>Subagents למחקר/review שומרים את ההקשר הראשי נקי; headless ל-CI</a:t>
+              <a:t>שילוב עם תזמון (מודול 2) = סוכן שרץ ברקע לגמרי לבד</a:t>
             </a:r>
             <a:endParaRPr lang="en-US" sz="1500" dirty="0"/>
           </a:p>
@@ -5406,7 +6154,7 @@
                 <a:ea typeface="Calibri" pitchFamily="34" charset="-122"/>
                 <a:cs typeface="Calibri" pitchFamily="34" charset="-120"/>
               </a:rPr>
-              <a:t>עיקרון-על</a:t>
+              <a:t>מתי לבחור בזה</a:t>
             </a:r>
             <a:endParaRPr lang="en-US" sz="1100" dirty="0"/>
           </a:p>
@@ -5448,7 +6196,7 @@
                 <a:ea typeface="Calibri" pitchFamily="34" charset="-122"/>
                 <a:cs typeface="Calibri" pitchFamily="34" charset="-120"/>
               </a:rPr>
-              <a:t>ככל שההוראות (CLAUDE.md, hooks) ברורות יותר מראש - כך התוצאות עקביות ואמינות יותר.</a:t>
+              <a:t>כשבונים מוצר AI מלא, לא רק אוטומציה פנימית חד-פעמית.</a:t>
             </a:r>
             <a:endParaRPr lang="en-US" sz="1350" dirty="0"/>
           </a:p>
@@ -5468,7 +6216,7 @@
     <p:bg>
       <p:bgPr>
         <a:solidFill>
-          <a:srgbClr val="0B1930"/>
+          <a:srgbClr val="FFFFFF"/>
         </a:solidFill>
       </p:bgPr>
     </p:bg>
@@ -5494,39 +6242,56 @@
         </p:nvSpPr>
         <p:spPr>
           <a:xfrm>
-            <a:off x="-1828800" y="-1828800"/>
-            <a:ext cx="5486400" cy="5486400"/>
+            <a:off x="10835640" y="502920"/>
+            <a:ext cx="685800" cy="685800"/>
           </a:xfrm>
           <a:prstGeom prst="ellipse">
             <a:avLst/>
           </a:prstGeom>
           <a:solidFill>
-            <a:srgbClr val="065A82">
-              <a:alpha val="35000"/>
-            </a:srgbClr>
+            <a:srgbClr val="065A82"/>
           </a:solidFill>
           <a:ln/>
         </p:spPr>
       </p:sp>
       <p:sp>
         <p:nvSpPr>
-          <p:cNvPr id="3" name="Shape 1"/>
-          <p:cNvSpPr/>
-          <p:nvPr/>
-        </p:nvSpPr>
-        <p:spPr>
-          <a:xfrm>
-            <a:off x="731520" y="1371600"/>
-            <a:ext cx="1005840" cy="1005840"/>
-          </a:xfrm>
-          <a:prstGeom prst="ellipse">
-            <a:avLst/>
-          </a:prstGeom>
-          <a:solidFill>
-            <a:srgbClr val="2ECC71"/>
-          </a:solidFill>
-          <a:ln/>
-        </p:spPr>
+          <p:cNvPr id="3" name="Text 1"/>
+          <p:cNvSpPr/>
+          <p:nvPr/>
+        </p:nvSpPr>
+        <p:spPr>
+          <a:xfrm>
+            <a:off x="10835640" y="502920"/>
+            <a:ext cx="685800" cy="685800"/>
+          </a:xfrm>
+          <a:prstGeom prst="rect">
+            <a:avLst/>
+          </a:prstGeom>
+          <a:noFill/>
+          <a:ln/>
+        </p:spPr>
+        <p:txBody>
+          <a:bodyPr wrap="square" lIns="0" tIns="0" rIns="0" bIns="0" rtlCol="0" anchor="ctr"/>
+          <a:lstStyle/>
+          <a:p>
+            <a:pPr algn="ctr" indent="0" marL="0">
+              <a:buNone/>
+            </a:pPr>
+            <a:r>
+              <a:rPr lang="en-US" sz="2200" b="1" dirty="0">
+                <a:solidFill>
+                  <a:srgbClr val="FFFFFF"/>
+                </a:solidFill>
+                <a:latin typeface="Calibri" pitchFamily="34" charset="0"/>
+                <a:ea typeface="Calibri" pitchFamily="34" charset="-122"/>
+                <a:cs typeface="Calibri" pitchFamily="34" charset="-120"/>
+              </a:rPr>
+              <a:t>7</a:t>
+            </a:r>
+            <a:endParaRPr lang="en-US" sz="2200" dirty="0"/>
+          </a:p>
+        </p:txBody>
       </p:sp>
       <p:sp>
         <p:nvSpPr>
@@ -5536,8 +6301,8 @@
         </p:nvSpPr>
         <p:spPr>
           <a:xfrm>
-            <a:off x="731520" y="1371600"/>
-            <a:ext cx="1005840" cy="1005840"/>
+            <a:off x="2560320" y="502920"/>
+            <a:ext cx="8138160" cy="457200"/>
           </a:xfrm>
           <a:prstGeom prst="rect">
             <a:avLst/>
@@ -5549,60 +6314,60 @@
           <a:bodyPr wrap="square" lIns="0" tIns="0" rIns="0" bIns="0" rtlCol="0" anchor="ctr"/>
           <a:lstStyle/>
           <a:p>
-            <a:pPr algn="ctr" indent="0" marL="0">
-              <a:buNone/>
-            </a:pPr>
-            <a:r>
-              <a:rPr lang="en-US" sz="3400" b="1" dirty="0">
-                <a:solidFill>
-                  <a:srgbClr val="FFFFFF"/>
-                </a:solidFill>
-                <a:latin typeface="Calibri" pitchFamily="34" charset="0"/>
-                <a:ea typeface="Calibri" pitchFamily="34" charset="-122"/>
-                <a:cs typeface="Calibri" pitchFamily="34" charset="-120"/>
-              </a:rPr>
-              <a:t>✓</a:t>
-            </a:r>
-            <a:endParaRPr lang="en-US" sz="3400" dirty="0"/>
-          </a:p>
-        </p:txBody>
-      </p:sp>
-      <p:sp>
-        <p:nvSpPr>
-          <p:cNvPr id="5" name="Text 3"/>
-          <p:cNvSpPr/>
-          <p:nvPr/>
-        </p:nvSpPr>
-        <p:spPr>
-          <a:xfrm>
-            <a:off x="731520" y="2651760"/>
-            <a:ext cx="10698480" cy="1005840"/>
-          </a:xfrm>
-          <a:prstGeom prst="rect">
-            <a:avLst/>
-          </a:prstGeom>
-          <a:noFill/>
-          <a:ln/>
-        </p:spPr>
-        <p:txBody>
-          <a:bodyPr wrap="square" rtlCol="0" anchor="ctr"/>
-          <a:lstStyle/>
-          <a:p>
             <a:pPr algn="r" indent="0" marL="0">
               <a:buNone/>
             </a:pPr>
             <a:r>
-              <a:rPr lang="en-US" sz="3200" b="1" dirty="0">
-                <a:solidFill>
-                  <a:srgbClr val="FFFFFF"/>
+              <a:rPr lang="en-US" sz="2400" b="1" dirty="0">
+                <a:solidFill>
+                  <a:srgbClr val="21295C"/>
                 </a:solidFill>
                 <a:latin typeface="Cambria" pitchFamily="34" charset="0"/>
                 <a:ea typeface="Cambria" pitchFamily="34" charset="-122"/>
                 <a:cs typeface="Cambria" pitchFamily="34" charset="-120"/>
               </a:rPr>
-              <a:t>כל הכבוד - סיימתם את כל האקדמיה!</a:t>
-            </a:r>
-            <a:endParaRPr lang="en-US" sz="3200" dirty="0"/>
+              <a:t>ניצול מקסימלי של קלוד קוד</a:t>
+            </a:r>
+            <a:endParaRPr lang="en-US" sz="2400" dirty="0"/>
+          </a:p>
+        </p:txBody>
+      </p:sp>
+      <p:sp>
+        <p:nvSpPr>
+          <p:cNvPr id="5" name="Text 3"/>
+          <p:cNvSpPr/>
+          <p:nvPr/>
+        </p:nvSpPr>
+        <p:spPr>
+          <a:xfrm>
+            <a:off x="2560320" y="896112"/>
+            <a:ext cx="8138160" cy="320040"/>
+          </a:xfrm>
+          <a:prstGeom prst="rect">
+            <a:avLst/>
+          </a:prstGeom>
+          <a:noFill/>
+          <a:ln/>
+        </p:spPr>
+        <p:txBody>
+          <a:bodyPr wrap="square" lIns="0" tIns="0" rIns="0" bIns="0" rtlCol="0" anchor="ctr"/>
+          <a:lstStyle/>
+          <a:p>
+            <a:pPr algn="r" indent="0" marL="0">
+              <a:buNone/>
+            </a:pPr>
+            <a:r>
+              <a:rPr lang="en-US" sz="1100" b="1" dirty="0">
+                <a:solidFill>
+                  <a:srgbClr val="1C7293"/>
+                </a:solidFill>
+                <a:latin typeface="Calibri" pitchFamily="34" charset="0"/>
+                <a:ea typeface="Calibri" pitchFamily="34" charset="-122"/>
+                <a:cs typeface="Calibri" pitchFamily="34" charset="-120"/>
+              </a:rPr>
+              <a:t>CLAUDE.MD · PLAN MODE · SUBAGENTS</a:t>
+            </a:r>
+            <a:endParaRPr lang="en-US" sz="1100" dirty="0"/>
           </a:p>
         </p:txBody>
       </p:sp>
@@ -5614,37 +6379,204 @@
         </p:nvSpPr>
         <p:spPr>
           <a:xfrm>
-            <a:off x="731520" y="3657600"/>
-            <a:ext cx="10149840" cy="1188720"/>
-          </a:xfrm>
-          <a:prstGeom prst="rect">
-            <a:avLst/>
-          </a:prstGeom>
-          <a:noFill/>
-          <a:ln/>
-        </p:spPr>
-        <p:txBody>
-          <a:bodyPr wrap="square" rtlCol="0" anchor="ctr"/>
+            <a:off x="4709160" y="1508760"/>
+            <a:ext cx="6492240" cy="4846320"/>
+          </a:xfrm>
+          <a:prstGeom prst="rect">
+            <a:avLst/>
+          </a:prstGeom>
+          <a:noFill/>
+          <a:ln/>
+        </p:spPr>
+        <p:txBody>
+          <a:bodyPr wrap="square" rtlCol="0" anchor="t"/>
+          <a:lstStyle/>
+          <a:p>
+            <a:pPr rtl="1" algn="r" marL="342900" indent="-342900">
+              <a:spcAft>
+                <a:spcPts val="1200"/>
+              </a:spcAft>
+              <a:buSzPct val="100000"/>
+              <a:buChar char="▪"/>
+            </a:pPr>
+            <a:r>
+              <a:rPr lang="en-US" sz="1500" dirty="0">
+                <a:solidFill>
+                  <a:srgbClr val="1B2430"/>
+                </a:solidFill>
+                <a:latin typeface="Calibri" pitchFamily="34" charset="0"/>
+                <a:ea typeface="Calibri" pitchFamily="34" charset="-122"/>
+                <a:cs typeface="Calibri" pitchFamily="34" charset="-120"/>
+              </a:rPr>
+              <a:t>CLAUDE.md - זיכרון פרויקט קבוע: מבנה, מוסכמות, פקודות build/test</a:t>
+            </a:r>
+            <a:endParaRPr lang="en-US" sz="1500" dirty="0"/>
+          </a:p>
+          <a:p>
+            <a:pPr rtl="1" algn="r" marL="342900" indent="-342900">
+              <a:spcAft>
+                <a:spcPts val="1200"/>
+              </a:spcAft>
+              <a:buSzPct val="100000"/>
+              <a:buChar char="▪"/>
+            </a:pPr>
+            <a:r>
+              <a:rPr lang="en-US" sz="1500" dirty="0">
+                <a:solidFill>
+                  <a:srgbClr val="1B2430"/>
+                </a:solidFill>
+                <a:latin typeface="Calibri" pitchFamily="34" charset="0"/>
+                <a:ea typeface="Calibri" pitchFamily="34" charset="-122"/>
+                <a:cs typeface="Calibri" pitchFamily="34" charset="-120"/>
+              </a:rPr>
+              <a:t>Plan Mode לפני שינויים גדולים - מפחית טעויות יקרות</a:t>
+            </a:r>
+            <a:endParaRPr lang="en-US" sz="1500" dirty="0"/>
+          </a:p>
+          <a:p>
+            <a:pPr rtl="1" algn="r" marL="342900" indent="-342900">
+              <a:spcAft>
+                <a:spcPts val="1200"/>
+              </a:spcAft>
+              <a:buSzPct val="100000"/>
+              <a:buChar char="▪"/>
+            </a:pPr>
+            <a:r>
+              <a:rPr lang="en-US" sz="1500" dirty="0">
+                <a:solidFill>
+                  <a:srgbClr val="1B2430"/>
+                </a:solidFill>
+                <a:latin typeface="Calibri" pitchFamily="34" charset="0"/>
+                <a:ea typeface="Calibri" pitchFamily="34" charset="-122"/>
+                <a:cs typeface="Calibri" pitchFamily="34" charset="-120"/>
+              </a:rPr>
+              <a:t>ניהול טוקנים: Prompt Caching, האצלה ל-subagents, הגבלת scope מפורשת</a:t>
+            </a:r>
+            <a:endParaRPr lang="en-US" sz="1500" dirty="0"/>
+          </a:p>
+          <a:p>
+            <a:pPr rtl="1" algn="r" marL="342900" indent="-342900">
+              <a:spcAft>
+                <a:spcPts val="1200"/>
+              </a:spcAft>
+              <a:buSzPct val="100000"/>
+              <a:buChar char="▪"/>
+            </a:pPr>
+            <a:r>
+              <a:rPr lang="en-US" sz="1500" dirty="0">
+                <a:solidFill>
+                  <a:srgbClr val="1B2430"/>
+                </a:solidFill>
+                <a:latin typeface="Calibri" pitchFamily="34" charset="0"/>
+                <a:ea typeface="Calibri" pitchFamily="34" charset="-122"/>
+                <a:cs typeface="Calibri" pitchFamily="34" charset="-120"/>
+              </a:rPr>
+              <a:t>אין לולאת בדיקה = אין דרך לוודא שהשינוי לא שבר משהו - השקיעו בטסטים</a:t>
+            </a:r>
+            <a:endParaRPr lang="en-US" sz="1500" dirty="0"/>
+          </a:p>
+        </p:txBody>
+      </p:sp>
+      <p:sp>
+        <p:nvSpPr>
+          <p:cNvPr id="7" name="Shape 5"/>
+          <p:cNvSpPr/>
+          <p:nvPr/>
+        </p:nvSpPr>
+        <p:spPr>
+          <a:xfrm>
+            <a:off x="411480" y="1508760"/>
+            <a:ext cx="3931920" cy="4846320"/>
+          </a:xfrm>
+          <a:prstGeom prst="roundRect">
+            <a:avLst>
+              <a:gd name="adj" fmla="val 2791"/>
+            </a:avLst>
+          </a:prstGeom>
+          <a:solidFill>
+            <a:srgbClr val="21295C"/>
+          </a:solidFill>
+          <a:ln/>
+        </p:spPr>
+      </p:sp>
+      <p:sp>
+        <p:nvSpPr>
+          <p:cNvPr id="8" name="Text 6"/>
+          <p:cNvSpPr/>
+          <p:nvPr/>
+        </p:nvSpPr>
+        <p:spPr>
+          <a:xfrm>
+            <a:off x="731520" y="1828800"/>
+            <a:ext cx="3291840" cy="320040"/>
+          </a:xfrm>
+          <a:prstGeom prst="rect">
+            <a:avLst/>
+          </a:prstGeom>
+          <a:noFill/>
+          <a:ln/>
+        </p:spPr>
+        <p:txBody>
+          <a:bodyPr wrap="square" lIns="0" tIns="0" rIns="0" bIns="0" rtlCol="0" anchor="ctr"/>
+          <a:lstStyle/>
+          <a:p>
+            <a:pPr algn="r" indent="0" marL="0">
+              <a:buNone/>
+            </a:pPr>
+            <a:r>
+              <a:rPr lang="en-US" sz="1100" b="1" dirty="0">
+                <a:solidFill>
+                  <a:srgbClr val="7FD9E8"/>
+                </a:solidFill>
+                <a:latin typeface="Calibri" pitchFamily="34" charset="0"/>
+                <a:ea typeface="Calibri" pitchFamily="34" charset="-122"/>
+                <a:cs typeface="Calibri" pitchFamily="34" charset="-120"/>
+              </a:rPr>
+              <a:t>עיקרון-על</a:t>
+            </a:r>
+            <a:endParaRPr lang="en-US" sz="1100" dirty="0"/>
+          </a:p>
+        </p:txBody>
+      </p:sp>
+      <p:sp>
+        <p:nvSpPr>
+          <p:cNvPr id="9" name="Text 7"/>
+          <p:cNvSpPr/>
+          <p:nvPr/>
+        </p:nvSpPr>
+        <p:spPr>
+          <a:xfrm>
+            <a:off x="731520" y="2240280"/>
+            <a:ext cx="3337560" cy="3931920"/>
+          </a:xfrm>
+          <a:prstGeom prst="rect">
+            <a:avLst/>
+          </a:prstGeom>
+          <a:noFill/>
+          <a:ln/>
+        </p:spPr>
+        <p:txBody>
+          <a:bodyPr wrap="square" lIns="0" tIns="0" rIns="0" bIns="0" rtlCol="0" anchor="t"/>
           <a:lstStyle/>
           <a:p>
             <a:pPr algn="r" indent="0" marL="0">
               <a:lnSpc>
-                <a:spcPct val="130000"/>
+                <a:spcPct val="125000"/>
               </a:lnSpc>
               <a:buNone/>
             </a:pPr>
             <a:r>
-              <a:rPr lang="en-US" sz="1600" dirty="0">
-                <a:solidFill>
-                  <a:srgbClr val="CADCFC"/>
-                </a:solidFill>
-                <a:latin typeface="Calibri" pitchFamily="34" charset="0"/>
-                <a:ea typeface="Calibri" pitchFamily="34" charset="-122"/>
-                <a:cs typeface="Calibri" pitchFamily="34" charset="-120"/>
-              </a:rPr>
-              <a:t>מהבנת מודלי שפה, דרך בניית סוכנים והנדסת מערכות, תכנות Fullstack מלא, ועד חיבור הכל לעולם האמיתי דרך אוטומציות. דרך שלמה ומקצועית.</a:t>
-            </a:r>
-            <a:endParaRPr lang="en-US" sz="1600" dirty="0"/>
+              <a:rPr lang="en-US" sz="1350" i="1" dirty="0">
+                <a:solidFill>
+                  <a:srgbClr val="E8EEF5"/>
+                </a:solidFill>
+                <a:latin typeface="Calibri" pitchFamily="34" charset="0"/>
+                <a:ea typeface="Calibri" pitchFamily="34" charset="-122"/>
+                <a:cs typeface="Calibri" pitchFamily="34" charset="-120"/>
+              </a:rPr>
+              <a:t>ככל שההוראות (CLAUDE.md, hooks) ברורות יותר מראש - כך התוצאות עקביות ואמינות יותר.</a:t>
+            </a:r>
+            <a:endParaRPr lang="en-US" sz="1350" dirty="0"/>
           </a:p>
         </p:txBody>
       </p:sp>
